--- a/instructor/modules/Module04-State-Management.pptx
+++ b/instructor/modules/Module04-State-Management.pptx
@@ -16131,7 +16131,7 @@
                 <a:ea typeface="Arial" pitchFamily="34" charset="-122"/>
                 <a:cs typeface="Arial" pitchFamily="34" charset="-120"/>
               </a:rPr>
-              <a:t>90 minutes  ·  Hands-on  ·  Three solution branches (one per tool)</a:t>
+              <a:t>90 minutes  ·  Hands-on  ·  Three reference solutions (one per tool)</a:t>
             </a:r>
             <a:endParaRPr lang="en-US" sz="1300" dirty="0"/>
           </a:p>
